--- a/presentation/MORS_ASI-HACK-2026_Deck.pptx
+++ b/presentation/MORS_ASI-HACK-2026_Deck.pptx
@@ -3422,7 +3422,7 @@
                 </a:solidFill>
                 <a:latin typeface="Consolas"/>
               </a:rPr>
-              <a:t>CERTIFIED 96/100</a:t>
+              <a:t>CERTIFIED 98/100</a:t>
             </a:r>
           </a:p>
         </p:txBody>
@@ -3625,7 +3625,7 @@
                 </a:solidFill>
                 <a:latin typeface="Consolas"/>
               </a:rPr>
-              <a:t>4 agents  ·  18 modules  ·  1,711 rows  ·  225 audit checks  ·  0 failures</a:t>
+              <a:t>4 agents  ·  19 API modules  ·  1,714 rows  ·  224 audit checks  ·  0 failures</a:t>
             </a:r>
           </a:p>
           <a:p>
@@ -3641,7 +3641,7 @@
                 </a:solidFill>
                 <a:latin typeface="Consolas"/>
               </a:rPr>
-              <a:t>16 curated sources + 12 data sources  ·  report PDF: 44 pages</a:t>
+              <a:t>16 curated sources + 8 data sources  ·  report PDF: 44 pages</a:t>
             </a:r>
           </a:p>
         </p:txBody>
@@ -4221,7 +4221,7 @@
                 </a:solidFill>
                 <a:latin typeface="Consolas"/>
               </a:rPr>
-              <a:t>CERTIFIED 96/100 · 225 checks · 0 failures · 8/8 conditions</a:t>
+              <a:t>CERTIFIED 98/100 · 224 checks · 0 failures · 8/8 conditions</a:t>
             </a:r>
           </a:p>
           <a:p>
@@ -4964,7 +4964,7 @@
                 </a:solidFill>
                 <a:latin typeface="Segoe UI"/>
               </a:rPr>
-              <a:t>Data reality after cleaning: 0.192% missing cells · 0 duplicates · 167 QC flags · light-curve S/N 12.5.</a:t>
+              <a:t>Data reality after cleaning: 0.158% missing cells · 0 duplicates · 166 QC flags · light-curve S/N 12.5.</a:t>
             </a:r>
           </a:p>
         </p:txBody>
@@ -5154,7 +5154,7 @@
                 </a:solidFill>
                 <a:latin typeface="Consolas"/>
               </a:rPr>
-              <a:t>DATA.MORS data-health · 8,840 cells audited per run</a:t>
+              <a:t>DATA.MORS data-health · 8,873 cells audited per run</a:t>
             </a:r>
           </a:p>
         </p:txBody>
@@ -5280,7 +5280,7 @@
                 </a:solidFill>
                 <a:latin typeface="Orbitron"/>
               </a:rPr>
-              <a:t>0.192%</a:t>
+              <a:t>0.158%</a:t>
             </a:r>
           </a:p>
         </p:txBody>
@@ -5532,7 +5532,7 @@
                 </a:solidFill>
                 <a:latin typeface="Orbitron"/>
               </a:rPr>
-              <a:t>99.808%</a:t>
+              <a:t>99.842%</a:t>
             </a:r>
           </a:p>
         </p:txBody>
@@ -5658,7 +5658,7 @@
                 </a:solidFill>
                 <a:latin typeface="Orbitron"/>
               </a:rPr>
-              <a:t>167</a:t>
+              <a:t>166</a:t>
             </a:r>
           </a:p>
         </p:txBody>
@@ -9646,7 +9646,7 @@
                 </a:solidFill>
                 <a:latin typeface="Segoe UI"/>
               </a:rPr>
-              <a:t>Live card P-001: council runs local_fallback under Gemini 429 → expected delta  council.engine: local_fallback → gemini.</a:t>
+              <a:t>When Gemini 429 hits, council drops to local_fallback → expected delta  council.engine: local_fallback → gemini.</a:t>
             </a:r>
           </a:p>
         </p:txBody>
@@ -9729,7 +9729,7 @@
                 </a:solidFill>
                 <a:latin typeface="Segoe UI"/>
               </a:rPr>
-              <a:t>Live card P-006: spectral indices are reference-labelled → delta  spectral.provenance: reference spectra → scene-identified L2A.</a:t>
+              <a:t>Spectral indices are reference-labelled (card open while that holds) → delta  provenance: reference spectra → scene-identified L2A.</a:t>
             </a:r>
           </a:p>
         </p:txBody>
@@ -13679,7 +13679,7 @@
                 </a:solidFill>
                 <a:latin typeface="Orbitron"/>
               </a:rPr>
-              <a:t>225</a:t>
+              <a:t>224</a:t>
             </a:r>
           </a:p>
         </p:txBody>
@@ -13844,7 +13844,7 @@
                 </a:solidFill>
                 <a:latin typeface="Orbitron"/>
               </a:rPr>
-              <a:t>99.81%</a:t>
+              <a:t>99.842%</a:t>
             </a:r>
           </a:p>
         </p:txBody>
@@ -13922,7 +13922,7 @@
                 </a:solidFill>
                 <a:latin typeface="Segoe UI"/>
               </a:rPr>
-              <a:t>8,840 cells · 1,711 rows</a:t>
+              <a:t>8,873 cells · 1,714 rows</a:t>
             </a:r>
           </a:p>
         </p:txBody>
@@ -14174,7 +14174,7 @@
                 </a:solidFill>
                 <a:latin typeface="Orbitron"/>
               </a:rPr>
-              <a:t>96/100</a:t>
+              <a:t>98/100</a:t>
             </a:r>
           </a:p>
         </p:txBody>
